--- a/01 Classes/Aula 08 - Aplicação Cloud Indústria 40 Python IoT - Tecnologias Emergentes.pptx
+++ b/01 Classes/Aula 08 - Aplicação Cloud Indústria 40 Python IoT - Tecnologias Emergentes.pptx
@@ -5400,7 +5400,7 @@
                 <a:latin typeface="Times New Roman" panose="02020603050405020304" pitchFamily="18" charset="0"/>
                 <a:cs typeface="Times New Roman" panose="02020603050405020304" pitchFamily="18" charset="0"/>
               </a:rPr>
-              <a:t>A capacidade de se adaptar a mudanças abruptas no contexto e nas condições com rapidez e sem grandes impactos. </a:t>
+              <a:t>	A capacidade de se adaptar a mudanças abruptas no contexto e nas condições com rapidez e sem grandes impactos. </a:t>
             </a:r>
           </a:p>
           <a:p>
@@ -5433,7 +5433,7 @@
                 <a:latin typeface="Times New Roman" panose="02020603050405020304" pitchFamily="18" charset="0"/>
                 <a:cs typeface="Times New Roman" panose="02020603050405020304" pitchFamily="18" charset="0"/>
               </a:rPr>
-              <a:t>As operações específicas do produto podem ser compostas com base nas exigências específicas do cliente, aproximando a oferta de bens à de serviços personalizados. </a:t>
+              <a:t>	As operações específicas do produto podem ser compostas com base nas exigências específicas do cliente, aproximando a oferta de bens à de serviços personalizados. </a:t>
             </a:r>
           </a:p>
           <a:p>
@@ -5686,7 +5686,49 @@
                 <a:latin typeface="Times New Roman" panose="02020603050405020304" pitchFamily="18" charset="0"/>
                 <a:cs typeface="Times New Roman" panose="02020603050405020304" pitchFamily="18" charset="0"/>
               </a:rPr>
-              <a:t> (CPPS, no acrônimo em inglês). </a:t>
+              <a:t> (</a:t>
+            </a:r>
+            <a:r>
+              <a:rPr lang="pt-BR" sz="2000" b="1" dirty="0">
+                <a:latin typeface="Times New Roman" panose="02020603050405020304" pitchFamily="18" charset="0"/>
+                <a:cs typeface="Times New Roman" panose="02020603050405020304" pitchFamily="18" charset="0"/>
+              </a:rPr>
+              <a:t>CPPS</a:t>
+            </a:r>
+            <a:r>
+              <a:rPr lang="pt-BR" sz="2000" dirty="0">
+                <a:latin typeface="Times New Roman" panose="02020603050405020304" pitchFamily="18" charset="0"/>
+                <a:cs typeface="Times New Roman" panose="02020603050405020304" pitchFamily="18" charset="0"/>
+              </a:rPr>
+              <a:t>, Cyber-</a:t>
+            </a:r>
+            <a:r>
+              <a:rPr lang="pt-BR" sz="2000" dirty="0" err="1">
+                <a:latin typeface="Times New Roman" panose="02020603050405020304" pitchFamily="18" charset="0"/>
+                <a:cs typeface="Times New Roman" panose="02020603050405020304" pitchFamily="18" charset="0"/>
+              </a:rPr>
+              <a:t>Physical</a:t>
+            </a:r>
+            <a:r>
+              <a:rPr lang="pt-BR" sz="2000" dirty="0">
+                <a:latin typeface="Times New Roman" panose="02020603050405020304" pitchFamily="18" charset="0"/>
+                <a:cs typeface="Times New Roman" panose="02020603050405020304" pitchFamily="18" charset="0"/>
+              </a:rPr>
+              <a:t> </a:t>
+            </a:r>
+            <a:r>
+              <a:rPr lang="pt-BR" sz="2000" dirty="0" err="1">
+                <a:latin typeface="Times New Roman" panose="02020603050405020304" pitchFamily="18" charset="0"/>
+                <a:cs typeface="Times New Roman" panose="02020603050405020304" pitchFamily="18" charset="0"/>
+              </a:rPr>
+              <a:t>Production</a:t>
+            </a:r>
+            <a:r>
+              <a:rPr lang="pt-BR" sz="2000" dirty="0">
+                <a:latin typeface="Times New Roman" panose="02020603050405020304" pitchFamily="18" charset="0"/>
+                <a:cs typeface="Times New Roman" panose="02020603050405020304" pitchFamily="18" charset="0"/>
+              </a:rPr>
+              <a:t> Systems). </a:t>
             </a:r>
           </a:p>
           <a:p>
@@ -5944,6 +5986,69 @@
           </a:prstGeom>
         </p:spPr>
       </p:pic>
+      <p:sp>
+        <p:nvSpPr>
+          <p:cNvPr id="4" name="CaixaDeTexto 3">
+            <a:extLst>
+              <a:ext uri="{FF2B5EF4-FFF2-40B4-BE49-F238E27FC236}">
+                <a16:creationId xmlns:a16="http://schemas.microsoft.com/office/drawing/2014/main" id="{727D9A01-7381-BEEC-C770-7829A8ED8B43}"/>
+              </a:ext>
+            </a:extLst>
+          </p:cNvPr>
+          <p:cNvSpPr txBox="1"/>
+          <p:nvPr/>
+        </p:nvSpPr>
+        <p:spPr>
+          <a:xfrm>
+            <a:off x="4714549" y="909565"/>
+            <a:ext cx="1480421" cy="338554"/>
+          </a:xfrm>
+          <a:prstGeom prst="rect">
+            <a:avLst/>
+          </a:prstGeom>
+          <a:noFill/>
+          <a:ln w="12700" cap="flat">
+            <a:noFill/>
+            <a:miter lim="400000"/>
+          </a:ln>
+          <a:effectLst/>
+        </p:spPr>
+        <p:style>
+          <a:lnRef idx="0">
+            <a:scrgbClr r="0" g="0" b="0"/>
+          </a:lnRef>
+          <a:fillRef idx="0">
+            <a:scrgbClr r="0" g="0" b="0"/>
+          </a:fillRef>
+          <a:effectRef idx="0">
+            <a:scrgbClr r="0" g="0" b="0"/>
+          </a:effectRef>
+          <a:fontRef idx="none"/>
+        </p:style>
+        <p:txBody>
+          <a:bodyPr wrap="square">
+            <a:spAutoFit/>
+          </a:bodyPr>
+          <a:lstStyle/>
+          <a:p>
+            <a:r>
+              <a:rPr lang="pt-BR" sz="1600" b="1" i="0" dirty="0">
+                <a:solidFill>
+                  <a:srgbClr val="FF0000"/>
+                </a:solidFill>
+                <a:effectLst/>
+                <a:latin typeface="Google Sans"/>
+              </a:rPr>
+              <a:t>impressão 3D</a:t>
+            </a:r>
+            <a:endParaRPr lang="pt-BR" sz="1600" b="1" dirty="0">
+              <a:solidFill>
+                <a:srgbClr val="FF0000"/>
+              </a:solidFill>
+            </a:endParaRPr>
+          </a:p>
+        </p:txBody>
+      </p:sp>
     </p:spTree>
     <p:extLst>
       <p:ext uri="{BB962C8B-B14F-4D97-AF65-F5344CB8AC3E}">
@@ -6907,7 +7012,27 @@
                 <a:latin typeface="Times New Roman" panose="02020603050405020304" pitchFamily="18" charset="0"/>
                 <a:cs typeface="Times New Roman" panose="02020603050405020304" pitchFamily="18" charset="0"/>
               </a:rPr>
-              <a:t>Inteligência Artificial Limita (ANI) ...</a:t>
+              <a:t>Inteligência Artificial Limitada (</a:t>
+            </a:r>
+            <a:r>
+              <a:rPr lang="pt-BR" sz="2000" b="1" dirty="0">
+                <a:solidFill>
+                  <a:schemeClr val="tx1"/>
+                </a:solidFill>
+                <a:latin typeface="Times New Roman" panose="02020603050405020304" pitchFamily="18" charset="0"/>
+                <a:cs typeface="Times New Roman" panose="02020603050405020304" pitchFamily="18" charset="0"/>
+              </a:rPr>
+              <a:t>ANI</a:t>
+            </a:r>
+            <a:r>
+              <a:rPr lang="pt-BR" sz="2000" dirty="0">
+                <a:solidFill>
+                  <a:schemeClr val="tx1"/>
+                </a:solidFill>
+                <a:latin typeface="Times New Roman" panose="02020603050405020304" pitchFamily="18" charset="0"/>
+                <a:cs typeface="Times New Roman" panose="02020603050405020304" pitchFamily="18" charset="0"/>
+              </a:rPr>
+              <a:t>) ...</a:t>
             </a:r>
           </a:p>
           <a:p>
@@ -6923,7 +7048,27 @@
                 <a:latin typeface="Times New Roman" panose="02020603050405020304" pitchFamily="18" charset="0"/>
                 <a:cs typeface="Times New Roman" panose="02020603050405020304" pitchFamily="18" charset="0"/>
               </a:rPr>
-              <a:t>Inteligência artificial geral (AGI) ...</a:t>
+              <a:t>Inteligência Artificial Geral (</a:t>
+            </a:r>
+            <a:r>
+              <a:rPr lang="pt-BR" sz="2000" b="1" dirty="0">
+                <a:solidFill>
+                  <a:srgbClr val="FF0000"/>
+                </a:solidFill>
+                <a:latin typeface="Times New Roman" panose="02020603050405020304" pitchFamily="18" charset="0"/>
+                <a:cs typeface="Times New Roman" panose="02020603050405020304" pitchFamily="18" charset="0"/>
+              </a:rPr>
+              <a:t>AGI</a:t>
+            </a:r>
+            <a:r>
+              <a:rPr lang="pt-BR" sz="2000" dirty="0">
+                <a:solidFill>
+                  <a:schemeClr val="tx1"/>
+                </a:solidFill>
+                <a:latin typeface="Times New Roman" panose="02020603050405020304" pitchFamily="18" charset="0"/>
+                <a:cs typeface="Times New Roman" panose="02020603050405020304" pitchFamily="18" charset="0"/>
+              </a:rPr>
+              <a:t>) ... futuro ....</a:t>
             </a:r>
           </a:p>
           <a:p>
@@ -6939,7 +7084,27 @@
                 <a:latin typeface="Times New Roman" panose="02020603050405020304" pitchFamily="18" charset="0"/>
                 <a:cs typeface="Times New Roman" panose="02020603050405020304" pitchFamily="18" charset="0"/>
               </a:rPr>
-              <a:t>Superinteligência (ASI)</a:t>
+              <a:t>Superinteligência Artificial (</a:t>
+            </a:r>
+            <a:r>
+              <a:rPr lang="pt-BR" sz="2000" b="1" dirty="0">
+                <a:solidFill>
+                  <a:schemeClr val="tx1"/>
+                </a:solidFill>
+                <a:latin typeface="Times New Roman" panose="02020603050405020304" pitchFamily="18" charset="0"/>
+                <a:cs typeface="Times New Roman" panose="02020603050405020304" pitchFamily="18" charset="0"/>
+              </a:rPr>
+              <a:t>ASI</a:t>
+            </a:r>
+            <a:r>
+              <a:rPr lang="pt-BR" sz="2000" dirty="0">
+                <a:solidFill>
+                  <a:schemeClr val="tx1"/>
+                </a:solidFill>
+                <a:latin typeface="Times New Roman" panose="02020603050405020304" pitchFamily="18" charset="0"/>
+                <a:cs typeface="Times New Roman" panose="02020603050405020304" pitchFamily="18" charset="0"/>
+              </a:rPr>
+              <a:t>) ... superação da mente humana, riscos ...</a:t>
             </a:r>
           </a:p>
         </p:txBody>
@@ -7130,7 +7295,7 @@
                 <a:latin typeface="Times New Roman" panose="02020603050405020304" pitchFamily="18" charset="0"/>
                 <a:cs typeface="Times New Roman" panose="02020603050405020304" pitchFamily="18" charset="0"/>
               </a:rPr>
-              <a:t>Inteligência artificial geral (</a:t>
+              <a:t>Inteligência Artificial Geral (</a:t>
             </a:r>
             <a:r>
               <a:rPr lang="pt-BR" sz="2000" b="1" dirty="0">
@@ -7150,7 +7315,7 @@
                 <a:latin typeface="Times New Roman" panose="02020603050405020304" pitchFamily="18" charset="0"/>
                 <a:cs typeface="Times New Roman" panose="02020603050405020304" pitchFamily="18" charset="0"/>
               </a:rPr>
-              <a:t>)</a:t>
+              <a:t>), IA forte.</a:t>
             </a:r>
             <a:endParaRPr lang="pt-BR" sz="2000" dirty="0">
               <a:solidFill>
@@ -7351,7 +7516,7 @@
                 <a:latin typeface="Times New Roman" panose="02020603050405020304" pitchFamily="18" charset="0"/>
                 <a:cs typeface="Times New Roman" panose="02020603050405020304" pitchFamily="18" charset="0"/>
               </a:rPr>
-              <a:t>Superinteligência (</a:t>
+              <a:t>Superinteligência Artificial (</a:t>
             </a:r>
             <a:r>
               <a:rPr lang="pt-BR" sz="2000" b="1" dirty="0">
@@ -7398,7 +7563,7 @@
                 <a:latin typeface="Times New Roman" panose="02020603050405020304" pitchFamily="18" charset="0"/>
                 <a:cs typeface="Times New Roman" panose="02020603050405020304" pitchFamily="18" charset="0"/>
               </a:rPr>
-              <a:t>É a denominação dada a um intelecto muito superior aos melhores cérebros humanos atuais em praticamente todas as áreas, incluindo criatividade científica, sabedoria geral e habilidade social.</a:t>
+              <a:t>	É a denominação dada a um intelecto muito superior aos melhores cérebros humanos atuais em praticamente todas as áreas, incluindo criatividade científica, sabedoria geral e habilidade social.</a:t>
             </a:r>
           </a:p>
           <a:p>
@@ -7425,7 +7590,47 @@
                 <a:latin typeface="Times New Roman" panose="02020603050405020304" pitchFamily="18" charset="0"/>
                 <a:cs typeface="Times New Roman" panose="02020603050405020304" pitchFamily="18" charset="0"/>
               </a:rPr>
-              <a:t>Superinteligência artificial pode levar ao fim da humanidade? Apocalipse ocasionado pela IA.</a:t>
+              <a:t>	</a:t>
+            </a:r>
+            <a:r>
+              <a:rPr lang="pt-BR" sz="2000" b="1" dirty="0">
+                <a:solidFill>
+                  <a:srgbClr val="FF0000"/>
+                </a:solidFill>
+                <a:latin typeface="Times New Roman" panose="02020603050405020304" pitchFamily="18" charset="0"/>
+                <a:cs typeface="Times New Roman" panose="02020603050405020304" pitchFamily="18" charset="0"/>
+              </a:rPr>
+              <a:t>Superinteligência Artificial </a:t>
+            </a:r>
+            <a:r>
+              <a:rPr lang="pt-BR" sz="2000" dirty="0">
+                <a:solidFill>
+                  <a:schemeClr val="tx1"/>
+                </a:solidFill>
+                <a:latin typeface="Times New Roman" panose="02020603050405020304" pitchFamily="18" charset="0"/>
+                <a:cs typeface="Times New Roman" panose="02020603050405020304" pitchFamily="18" charset="0"/>
+              </a:rPr>
+              <a:t>pode levar ao fim da humanidade? </a:t>
+            </a:r>
+            <a:r>
+              <a:rPr lang="pt-BR" sz="2000" b="1" dirty="0">
+                <a:solidFill>
+                  <a:srgbClr val="FF0000"/>
+                </a:solidFill>
+                <a:latin typeface="Times New Roman" panose="02020603050405020304" pitchFamily="18" charset="0"/>
+                <a:cs typeface="Times New Roman" panose="02020603050405020304" pitchFamily="18" charset="0"/>
+              </a:rPr>
+              <a:t>Apocalipse</a:t>
+            </a:r>
+            <a:r>
+              <a:rPr lang="pt-BR" sz="2000" dirty="0">
+                <a:solidFill>
+                  <a:schemeClr val="tx1"/>
+                </a:solidFill>
+                <a:latin typeface="Times New Roman" panose="02020603050405020304" pitchFamily="18" charset="0"/>
+                <a:cs typeface="Times New Roman" panose="02020603050405020304" pitchFamily="18" charset="0"/>
+              </a:rPr>
+              <a:t> ocasionado pela IA.</a:t>
             </a:r>
           </a:p>
           <a:p>
@@ -7574,7 +7779,7 @@
                 <a:latin typeface="Times New Roman" panose="02020603050405020304" pitchFamily="18" charset="0"/>
                 <a:cs typeface="Times New Roman" panose="02020603050405020304" pitchFamily="18" charset="0"/>
               </a:rPr>
-              <a:t>É uma solução que reproduz com exatidão as condições reais da operação industrial, garantindo previsibilidade e fornecendo dados de forma segura e assertiva. </a:t>
+              <a:t>	É uma solução que reproduz com exatidão as condições reais da operação industrial, garantindo previsibilidade e fornecendo dados de forma segura e assertiva. </a:t>
             </a:r>
           </a:p>
           <a:p>
@@ -7595,7 +7800,7 @@
                 <a:latin typeface="Times New Roman" panose="02020603050405020304" pitchFamily="18" charset="0"/>
                 <a:cs typeface="Times New Roman" panose="02020603050405020304" pitchFamily="18" charset="0"/>
               </a:rPr>
-              <a:t>Os dados podem ser utilizados estrategicamente em todas as etapas da cadeia produtiva, incluindo </a:t>
+              <a:t>	Os dados podem ser utilizados estrategicamente em todas as etapas da cadeia produtiva, incluindo </a:t>
             </a:r>
             <a:r>
               <a:rPr lang="pt-BR" sz="2000" dirty="0" err="1">
@@ -8265,7 +8470,7 @@
                 <a:latin typeface="Times New Roman" panose="02020603050405020304" pitchFamily="18" charset="0"/>
                 <a:cs typeface="Times New Roman" panose="02020603050405020304" pitchFamily="18" charset="0"/>
               </a:rPr>
-              <a:t>É a reprodução virtual de processos e ambientes de desenvolvimento e manufatura fabril. Virtualizar o funcionamento das plantas e procedimentos industrias, exemplo:</a:t>
+              <a:t>	É a reprodução virtual de processos e ambientes de desenvolvimento e manufatura fabril. Virtualizar o funcionamento das plantas e procedimentos industrias, exemplo:</a:t>
             </a:r>
           </a:p>
           <a:p>
@@ -8274,7 +8479,7 @@
               <a:buChar char="§"/>
             </a:pPr>
             <a:r>
-              <a:rPr lang="en-US" sz="2000" dirty="0">
+              <a:rPr lang="en-US" sz="1600" dirty="0">
                 <a:latin typeface="Times New Roman" panose="02020603050405020304" pitchFamily="18" charset="0"/>
                 <a:cs typeface="Times New Roman" panose="02020603050405020304" pitchFamily="18" charset="0"/>
               </a:rPr>
@@ -8287,7 +8492,7 @@
               <a:buChar char="§"/>
             </a:pPr>
             <a:r>
-              <a:rPr lang="en-US" sz="2000" dirty="0">
+              <a:rPr lang="en-US" sz="1600" dirty="0">
                 <a:latin typeface="Times New Roman" panose="02020603050405020304" pitchFamily="18" charset="0"/>
                 <a:cs typeface="Times New Roman" panose="02020603050405020304" pitchFamily="18" charset="0"/>
               </a:rPr>
@@ -8300,7 +8505,7 @@
               <a:buChar char="§"/>
             </a:pPr>
             <a:r>
-              <a:rPr lang="en-US" sz="2000" dirty="0">
+              <a:rPr lang="en-US" sz="1600" dirty="0">
                 <a:latin typeface="Times New Roman" panose="02020603050405020304" pitchFamily="18" charset="0"/>
                 <a:cs typeface="Times New Roman" panose="02020603050405020304" pitchFamily="18" charset="0"/>
               </a:rPr>
@@ -8313,7 +8518,7 @@
               <a:buChar char="§"/>
             </a:pPr>
             <a:r>
-              <a:rPr lang="en-US" sz="2000" dirty="0">
+              <a:rPr lang="en-US" sz="1600" dirty="0">
                 <a:latin typeface="Times New Roman" panose="02020603050405020304" pitchFamily="18" charset="0"/>
                 <a:cs typeface="Times New Roman" panose="02020603050405020304" pitchFamily="18" charset="0"/>
               </a:rPr>
@@ -8326,7 +8531,7 @@
               <a:buChar char="§"/>
             </a:pPr>
             <a:r>
-              <a:rPr lang="en-US" sz="2000" dirty="0">
+              <a:rPr lang="en-US" sz="1600" dirty="0">
                 <a:latin typeface="Times New Roman" panose="02020603050405020304" pitchFamily="18" charset="0"/>
                 <a:cs typeface="Times New Roman" panose="02020603050405020304" pitchFamily="18" charset="0"/>
               </a:rPr>
@@ -8339,7 +8544,7 @@
               <a:buChar char="§"/>
             </a:pPr>
             <a:r>
-              <a:rPr lang="en-US" sz="2000" dirty="0">
+              <a:rPr lang="en-US" sz="1600" dirty="0">
                 <a:latin typeface="Times New Roman" panose="02020603050405020304" pitchFamily="18" charset="0"/>
                 <a:cs typeface="Times New Roman" panose="02020603050405020304" pitchFamily="18" charset="0"/>
               </a:rPr>
@@ -8352,7 +8557,7 @@
               <a:buChar char="§"/>
             </a:pPr>
             <a:r>
-              <a:rPr lang="en-US" sz="2000" dirty="0">
+              <a:rPr lang="en-US" sz="1600" dirty="0">
                 <a:latin typeface="Times New Roman" panose="02020603050405020304" pitchFamily="18" charset="0"/>
                 <a:cs typeface="Times New Roman" panose="02020603050405020304" pitchFamily="18" charset="0"/>
               </a:rPr>
@@ -8365,31 +8570,19 @@
               <a:buChar char="§"/>
             </a:pPr>
             <a:r>
-              <a:rPr lang="en-US" sz="2000" dirty="0">
+              <a:rPr lang="en-US" sz="1600" dirty="0">
                 <a:latin typeface="Times New Roman" panose="02020603050405020304" pitchFamily="18" charset="0"/>
                 <a:cs typeface="Times New Roman" panose="02020603050405020304" pitchFamily="18" charset="0"/>
               </a:rPr>
               <a:t>Euro Truck Simulator 2</a:t>
             </a:r>
-            <a:endParaRPr lang="pt-BR" sz="2000" dirty="0">
+            <a:endParaRPr lang="pt-BR" sz="1600" dirty="0">
+              <a:solidFill>
+                <a:schemeClr val="tx1"/>
+              </a:solidFill>
               <a:latin typeface="Times New Roman" panose="02020603050405020304" pitchFamily="18" charset="0"/>
               <a:cs typeface="Times New Roman" panose="02020603050405020304" pitchFamily="18" charset="0"/>
             </a:endParaRPr>
-          </a:p>
-          <a:p>
-            <a:pPr marL="0" indent="0" algn="just">
-              <a:buNone/>
-            </a:pPr>
-            <a:r>
-              <a:rPr lang="pt-BR" sz="2000" dirty="0">
-                <a:solidFill>
-                  <a:schemeClr val="tx1"/>
-                </a:solidFill>
-                <a:latin typeface="Times New Roman" panose="02020603050405020304" pitchFamily="18" charset="0"/>
-                <a:cs typeface="Times New Roman" panose="02020603050405020304" pitchFamily="18" charset="0"/>
-              </a:rPr>
-              <a:t>	</a:t>
-            </a:r>
           </a:p>
         </p:txBody>
       </p:sp>
@@ -8492,7 +8685,7 @@
                 <a:latin typeface="Times New Roman" panose="02020603050405020304" pitchFamily="18" charset="0"/>
                 <a:cs typeface="Times New Roman" panose="02020603050405020304" pitchFamily="18" charset="0"/>
               </a:rPr>
-              <a:t>Uma tecnologia emergente é aquela que não impacta apenas o mundo dos negócios, mas também toda a sociedade. </a:t>
+              <a:t>	Uma tecnologia emergente é aquela que não impacta apenas o mundo dos negócios, mas também toda a sociedade. </a:t>
             </a:r>
           </a:p>
           <a:p>
@@ -8513,7 +8706,7 @@
                 <a:latin typeface="Times New Roman" panose="02020603050405020304" pitchFamily="18" charset="0"/>
                 <a:cs typeface="Times New Roman" panose="02020603050405020304" pitchFamily="18" charset="0"/>
               </a:rPr>
-              <a:t>São inovações que têm enorme potencial de modificar como interagimos com o mundo. </a:t>
+              <a:t>	São inovações que têm enorme potencial de modificar como interagimos com o mundo. </a:t>
             </a:r>
           </a:p>
           <a:p>
@@ -8534,7 +8727,7 @@
                 <a:latin typeface="Times New Roman" panose="02020603050405020304" pitchFamily="18" charset="0"/>
                 <a:cs typeface="Times New Roman" panose="02020603050405020304" pitchFamily="18" charset="0"/>
               </a:rPr>
-              <a:t>Cabe às empresas encontrar maneiras estratégicas de empregá-las para transformar a experiência do usuário, simplificar o dia a dia ou repensar processos onerosos e prejudiciais ao meio ambiente.</a:t>
+              <a:t>	Cabe às empresas encontrar maneiras estratégicas de empregá-las para transformar a experiência do usuário, simplificar o dia a dia ou repensar processos onerosos e prejudiciais ao meio ambiente.</a:t>
             </a:r>
           </a:p>
         </p:txBody>
@@ -9004,7 +9197,17 @@
                 <a:latin typeface="Times New Roman" panose="02020603050405020304" pitchFamily="18" charset="0"/>
                 <a:cs typeface="Times New Roman" panose="02020603050405020304" pitchFamily="18" charset="0"/>
               </a:rPr>
-              <a:t> e Wi-Fi 6</a:t>
+              <a:t> e </a:t>
+            </a:r>
+            <a:r>
+              <a:rPr lang="pt-BR" sz="2000" b="1" dirty="0">
+                <a:solidFill>
+                  <a:srgbClr val="FF0000"/>
+                </a:solidFill>
+                <a:latin typeface="Times New Roman" panose="02020603050405020304" pitchFamily="18" charset="0"/>
+                <a:cs typeface="Times New Roman" panose="02020603050405020304" pitchFamily="18" charset="0"/>
+              </a:rPr>
+              <a:t>Wi-Fi 6</a:t>
             </a:r>
           </a:p>
           <a:p>
@@ -11596,7 +11799,7 @@
                 <a:latin typeface="Times New Roman" panose="02020603050405020304" pitchFamily="18" charset="0"/>
                 <a:cs typeface="Times New Roman" panose="02020603050405020304" pitchFamily="18" charset="0"/>
               </a:rPr>
-              <a:t>A </a:t>
+              <a:t>	A </a:t>
             </a:r>
             <a:r>
               <a:rPr lang="pt-BR" sz="2000" b="1" dirty="0">
@@ -12421,7 +12624,7 @@
                 <a:latin typeface="Times New Roman" panose="02020603050405020304" pitchFamily="18" charset="0"/>
                 <a:cs typeface="Times New Roman" panose="02020603050405020304" pitchFamily="18" charset="0"/>
               </a:rPr>
-              <a:t>Trata-se da capacidade de garantir conexão, troca de informação e colaboração relevante tanto entre os sistemas </a:t>
+              <a:t>	Trata-se da capacidade de garantir conexão, troca de informação e colaboração relevante tanto entre os sistemas </a:t>
             </a:r>
             <a:r>
               <a:rPr lang="pt-BR" sz="2000" b="1" dirty="0" err="1">
@@ -12479,7 +12682,7 @@
                 <a:latin typeface="Times New Roman" panose="02020603050405020304" pitchFamily="18" charset="0"/>
                 <a:cs typeface="Times New Roman" panose="02020603050405020304" pitchFamily="18" charset="0"/>
               </a:rPr>
-              <a:t>O sistema </a:t>
+              <a:t>	O sistema </a:t>
             </a:r>
             <a:r>
               <a:rPr lang="pt-BR" sz="2000" dirty="0" err="1">
@@ -12514,7 +12717,7 @@
                 <a:latin typeface="Times New Roman" panose="02020603050405020304" pitchFamily="18" charset="0"/>
                 <a:cs typeface="Times New Roman" panose="02020603050405020304" pitchFamily="18" charset="0"/>
               </a:rPr>
-              <a:t>Em virtude disso, a virtualização só é possível quando a interoperabilidade está garantida. </a:t>
+              <a:t>	Em virtude disso, a virtualização só é possível quando a interoperabilidade está garantida. </a:t>
             </a:r>
           </a:p>
         </p:txBody>
@@ -12630,7 +12833,7 @@
                 <a:latin typeface="Times New Roman" panose="02020603050405020304" pitchFamily="18" charset="0"/>
                 <a:cs typeface="Times New Roman" panose="02020603050405020304" pitchFamily="18" charset="0"/>
               </a:rPr>
-              <a:t>É a capacidade de trabalhar em tempo real, tomando decisões com base em novos achados ou predições. </a:t>
+              <a:t>	É a capacidade de trabalhar em tempo real, tomando decisões com base em novos achados ou predições. </a:t>
             </a:r>
           </a:p>
           <a:p>
@@ -12663,7 +12866,7 @@
                 <a:latin typeface="Times New Roman" panose="02020603050405020304" pitchFamily="18" charset="0"/>
                 <a:cs typeface="Times New Roman" panose="02020603050405020304" pitchFamily="18" charset="0"/>
               </a:rPr>
-              <a:t>A capacidade de tomar decisões é distribuída e independente, não centralizada, aumentando a capacidade de resolver problemas assim que eles surgem, onde eles surgem. Com isso, o ambiente operacional garante flexibilidade. </a:t>
+              <a:t>	A capacidade de tomar decisões é distribuída e independente, não centralizada, aumentando a capacidade de resolver problemas assim que eles surgem, onde eles surgem. Com isso, o ambiente operacional garante flexibilidade. </a:t>
             </a:r>
           </a:p>
           <a:p>

--- a/01 Classes/Aula 08 - Aplicação Cloud Indústria 40 Python IoT - Tecnologias Emergentes.pptx
+++ b/01 Classes/Aula 08 - Aplicação Cloud Indústria 40 Python IoT - Tecnologias Emergentes.pptx
@@ -7105,6 +7105,125 @@
                 <a:cs typeface="Times New Roman" panose="02020603050405020304" pitchFamily="18" charset="0"/>
               </a:rPr>
               <a:t>) ... superação da mente humana, riscos ...</a:t>
+            </a:r>
+          </a:p>
+        </p:txBody>
+      </p:sp>
+      <p:sp>
+        <p:nvSpPr>
+          <p:cNvPr id="3" name="CaixaDeTexto 2">
+            <a:extLst>
+              <a:ext uri="{FF2B5EF4-FFF2-40B4-BE49-F238E27FC236}">
+                <a16:creationId xmlns:a16="http://schemas.microsoft.com/office/drawing/2014/main" id="{DED990A5-DCB7-E46A-C19C-259D1619794D}"/>
+              </a:ext>
+            </a:extLst>
+          </p:cNvPr>
+          <p:cNvSpPr txBox="1"/>
+          <p:nvPr/>
+        </p:nvSpPr>
+        <p:spPr>
+          <a:xfrm>
+            <a:off x="6199094" y="2295364"/>
+            <a:ext cx="2608729" cy="1815882"/>
+          </a:xfrm>
+          <a:prstGeom prst="rect">
+            <a:avLst/>
+          </a:prstGeom>
+          <a:noFill/>
+          <a:ln w="12700" cap="flat">
+            <a:noFill/>
+            <a:miter lim="400000"/>
+          </a:ln>
+          <a:effectLst/>
+        </p:spPr>
+        <p:style>
+          <a:lnRef idx="0">
+            <a:scrgbClr r="0" g="0" b="0"/>
+          </a:lnRef>
+          <a:fillRef idx="0">
+            <a:scrgbClr r="0" g="0" b="0"/>
+          </a:fillRef>
+          <a:effectRef idx="0">
+            <a:scrgbClr r="0" g="0" b="0"/>
+          </a:effectRef>
+          <a:fontRef idx="none"/>
+        </p:style>
+        <p:txBody>
+          <a:bodyPr wrap="square">
+            <a:spAutoFit/>
+          </a:bodyPr>
+          <a:lstStyle/>
+          <a:p>
+            <a:r>
+              <a:rPr lang="pt-BR" sz="1600" dirty="0">
+                <a:latin typeface="Times New Roman" panose="02020603050405020304" pitchFamily="18" charset="0"/>
+                <a:cs typeface="Times New Roman" panose="02020603050405020304" pitchFamily="18" charset="0"/>
+              </a:rPr>
+              <a:t>Inteligência artificial estreita.</a:t>
+            </a:r>
+          </a:p>
+          <a:p>
+            <a:r>
+              <a:rPr lang="pt-BR" sz="1600" dirty="0">
+                <a:latin typeface="Times New Roman" panose="02020603050405020304" pitchFamily="18" charset="0"/>
+                <a:cs typeface="Times New Roman" panose="02020603050405020304" pitchFamily="18" charset="0"/>
+              </a:rPr>
+              <a:t>Inteligência artificial geral.</a:t>
+            </a:r>
+          </a:p>
+          <a:p>
+            <a:r>
+              <a:rPr lang="pt-BR" sz="1600" dirty="0">
+                <a:latin typeface="Times New Roman" panose="02020603050405020304" pitchFamily="18" charset="0"/>
+                <a:cs typeface="Times New Roman" panose="02020603050405020304" pitchFamily="18" charset="0"/>
+              </a:rPr>
+              <a:t>Superinteligência artificial.</a:t>
+            </a:r>
+          </a:p>
+          <a:p>
+            <a:r>
+              <a:rPr lang="pt-BR" sz="1600" dirty="0">
+                <a:latin typeface="Times New Roman" panose="02020603050405020304" pitchFamily="18" charset="0"/>
+                <a:cs typeface="Times New Roman" panose="02020603050405020304" pitchFamily="18" charset="0"/>
+              </a:rPr>
+              <a:t>IA reativa.</a:t>
+            </a:r>
+          </a:p>
+          <a:p>
+            <a:r>
+              <a:rPr lang="pt-BR" sz="1600" dirty="0">
+                <a:latin typeface="Times New Roman" panose="02020603050405020304" pitchFamily="18" charset="0"/>
+                <a:cs typeface="Times New Roman" panose="02020603050405020304" pitchFamily="18" charset="0"/>
+              </a:rPr>
+              <a:t>IA com memória limitada.</a:t>
+            </a:r>
+          </a:p>
+          <a:p>
+            <a:r>
+              <a:rPr lang="pt-BR" sz="1600" dirty="0">
+                <a:latin typeface="Times New Roman" panose="02020603050405020304" pitchFamily="18" charset="0"/>
+                <a:cs typeface="Times New Roman" panose="02020603050405020304" pitchFamily="18" charset="0"/>
+              </a:rPr>
+              <a:t>IA com teoria da mente.</a:t>
+            </a:r>
+          </a:p>
+          <a:p>
+            <a:r>
+              <a:rPr lang="pt-BR" sz="1600" b="1" dirty="0">
+                <a:solidFill>
+                  <a:srgbClr val="FF0000"/>
+                </a:solidFill>
+                <a:latin typeface="Times New Roman" panose="02020603050405020304" pitchFamily="18" charset="0"/>
+                <a:cs typeface="Times New Roman" panose="02020603050405020304" pitchFamily="18" charset="0"/>
+              </a:rPr>
+              <a:t>IA autoconsciente</a:t>
+            </a:r>
+            <a:r>
+              <a:rPr lang="pt-BR" sz="1600" dirty="0">
+                <a:latin typeface="Times New Roman" panose="02020603050405020304" pitchFamily="18" charset="0"/>
+                <a:cs typeface="Times New Roman" panose="02020603050405020304" pitchFamily="18" charset="0"/>
+              </a:rPr>
+              <a:t>.</a:t>
             </a:r>
           </a:p>
         </p:txBody>
